--- a/carousel-output/C05-5-tanda-reset/C05.pptx
+++ b/carousel-output/C05-5-tanda-reset/C05.pptx
@@ -4747,7 +4747,39 @@
       </p:sp>
       <p:sp>
         <p:nvSpPr>
-          <p:cNvPr id="6" name="TextBox 5"/>
+          <p:cNvPr id="6" name="Highlight"/>
+          <p:cNvSpPr/>
+          <p:nvPr/>
+        </p:nvSpPr>
+        <p:spPr>
+          <a:xfrm>
+            <a:off x="3526854" y="7493794"/>
+            <a:ext cx="3233291" cy="1010412"/>
+          </a:xfrm>
+          <a:prstGeom prst="roundRect">
+            <a:avLst>
+              <a:gd name="adj" fmla="val 19607"/>
+            </a:avLst>
+          </a:prstGeom>
+          <a:solidFill>
+            <a:srgbClr val="AB2224"/>
+          </a:solidFill>
+          <a:ln>
+            <a:noFill/>
+          </a:ln>
+          <a:effectLst/>
+        </p:spPr>
+        <p:txBody>
+          <a:bodyPr rtlCol="0" anchor="ctr"/>
+          <a:lstStyle/>
+          <a:p>
+            <a:pPr algn="ctr"/>
+          </a:p>
+        </p:txBody>
+      </p:sp>
+      <p:sp>
+        <p:nvSpPr>
+          <p:cNvPr id="7" name="Teks"/>
           <p:cNvSpPr txBox="1"/>
           <p:nvPr/>
         </p:nvSpPr>
@@ -4779,7 +4811,7 @@
                 </a:solidFill>
                 <a:latin typeface="Poppins ExtraBold"/>
               </a:rPr>
-              <a:t>5 Tanda Kamu Butuh</a:t>
+              <a:t>5 Tanda Kamu</a:t>
             </a:r>
             <a:br/>
             <a:r>
@@ -4787,9 +4819,16 @@
                 <a:solidFill>
                   <a:srgbClr val="FFFFFF"/>
                 </a:solidFill>
-                <a:highlight>
-                  <a:srgbClr val="AB2224"/>
-                </a:highlight>
+                <a:latin typeface="Poppins ExtraBold"/>
+              </a:rPr>
+              <a:t>Butuh</a:t>
+            </a:r>
+            <a:br/>
+            <a:r>
+              <a:rPr b="0" i="0" sz="7800">
+                <a:solidFill>
+                  <a:srgbClr val="FFFFFF"/>
+                </a:solidFill>
                 <a:latin typeface="Poppins ExtraBold"/>
               </a:rPr>
               <a:t> Reset </a:t>
@@ -4799,7 +4838,7 @@
       </p:sp>
       <p:sp>
         <p:nvSpPr>
-          <p:cNvPr id="7" name="TextBox 6"/>
+          <p:cNvPr id="8" name="TextBox 7"/>
           <p:cNvSpPr txBox="1"/>
           <p:nvPr/>
         </p:nvSpPr>
@@ -4848,7 +4887,7 @@
       </p:sp>
       <p:sp>
         <p:nvSpPr>
-          <p:cNvPr id="8" name="Panah next (cincin)"/>
+          <p:cNvPr id="9" name="Panah next (cincin)"/>
           <p:cNvSpPr/>
           <p:nvPr/>
         </p:nvSpPr>
@@ -4878,7 +4917,7 @@
       </p:sp>
       <p:sp>
         <p:nvSpPr>
-          <p:cNvPr id="9" name="Panah next"/>
+          <p:cNvPr id="10" name="Panah next"/>
           <p:cNvSpPr/>
           <p:nvPr/>
         </p:nvSpPr>
@@ -5274,7 +5313,7 @@
                               <p:par>
                                 <p:cTn id="26" presetID="42" presetClass="entr" presetSubtype="0" fill="hold" grpId="0" nodeType="withEffect">
                                   <p:stCondLst>
-                                    <p:cond delay="800"/>
+                                    <p:cond delay="400"/>
                                   </p:stCondLst>
                                   <p:childTnLst>
                                     <p:set>
@@ -5330,9 +5369,9 @@
                                 </p:cTn>
                               </p:par>
                               <p:par>
-                                <p:cTn id="30" presetID="10" presetClass="entr" presetSubtype="0" fill="hold" grpId="0" nodeType="withEffect">
+                                <p:cTn id="30" presetID="42" presetClass="entr" presetSubtype="0" fill="hold" grpId="0" nodeType="withEffect">
                                   <p:stCondLst>
-                                    <p:cond delay="1600"/>
+                                    <p:cond delay="800"/>
                                   </p:stCondLst>
                                   <p:childTnLst>
                                     <p:set>
@@ -5355,24 +5394,47 @@
                                     </p:set>
                                     <p:animEffect transition="in" filter="fade">
                                       <p:cBhvr>
-                                        <p:cTn id="32" dur="500"/>
+                                        <p:cTn id="32" dur="700"/>
                                         <p:tgtEl>
                                           <p:spTgt spid="8"/>
                                         </p:tgtEl>
                                       </p:cBhvr>
                                     </p:animEffect>
+                                    <p:anim calcmode="lin" valueType="num">
+                                      <p:cBhvr additive="base">
+                                        <p:cTn id="33" dur="700" fill="hold"/>
+                                        <p:tgtEl>
+                                          <p:spTgt spid="8"/>
+                                        </p:tgtEl>
+                                        <p:attrNameLst>
+                                          <p:attrName>ppt_y</p:attrName>
+                                        </p:attrNameLst>
+                                      </p:cBhvr>
+                                      <p:tavLst>
+                                        <p:tav tm="0">
+                                          <p:val>
+                                            <p:strVal val="#ppt_y+.04"/>
+                                          </p:val>
+                                        </p:tav>
+                                        <p:tav tm="100000">
+                                          <p:val>
+                                            <p:strVal val="#ppt_y"/>
+                                          </p:val>
+                                        </p:tav>
+                                      </p:tavLst>
+                                    </p:anim>
                                   </p:childTnLst>
                                 </p:cTn>
                               </p:par>
                               <p:par>
-                                <p:cTn id="33" presetID="10" presetClass="entr" presetSubtype="0" fill="hold" grpId="0" nodeType="withEffect">
+                                <p:cTn id="34" presetID="10" presetClass="entr" presetSubtype="0" fill="hold" grpId="0" nodeType="withEffect">
                                   <p:stCondLst>
                                     <p:cond delay="1600"/>
                                   </p:stCondLst>
                                   <p:childTnLst>
                                     <p:set>
                                       <p:cBhvr>
-                                        <p:cTn id="34" dur="1" fill="hold">
+                                        <p:cTn id="35" dur="1" fill="hold">
                                           <p:stCondLst>
                                             <p:cond delay="0"/>
                                           </p:stCondLst>
@@ -5390,9 +5452,44 @@
                                     </p:set>
                                     <p:animEffect transition="in" filter="fade">
                                       <p:cBhvr>
-                                        <p:cTn id="35" dur="500"/>
+                                        <p:cTn id="36" dur="500"/>
                                         <p:tgtEl>
                                           <p:spTgt spid="9"/>
+                                        </p:tgtEl>
+                                      </p:cBhvr>
+                                    </p:animEffect>
+                                  </p:childTnLst>
+                                </p:cTn>
+                              </p:par>
+                              <p:par>
+                                <p:cTn id="37" presetID="10" presetClass="entr" presetSubtype="0" fill="hold" grpId="0" nodeType="withEffect">
+                                  <p:stCondLst>
+                                    <p:cond delay="1600"/>
+                                  </p:stCondLst>
+                                  <p:childTnLst>
+                                    <p:set>
+                                      <p:cBhvr>
+                                        <p:cTn id="38" dur="1" fill="hold">
+                                          <p:stCondLst>
+                                            <p:cond delay="0"/>
+                                          </p:stCondLst>
+                                        </p:cTn>
+                                        <p:tgtEl>
+                                          <p:spTgt spid="10"/>
+                                        </p:tgtEl>
+                                        <p:attrNameLst>
+                                          <p:attrName>style.visibility</p:attrName>
+                                        </p:attrNameLst>
+                                      </p:cBhvr>
+                                      <p:to>
+                                        <p:strVal val="visible"/>
+                                      </p:to>
+                                    </p:set>
+                                    <p:animEffect transition="in" filter="fade">
+                                      <p:cBhvr>
+                                        <p:cTn id="39" dur="500"/>
+                                        <p:tgtEl>
+                                          <p:spTgt spid="10"/>
                                         </p:tgtEl>
                                       </p:cBhvr>
                                     </p:animEffect>
@@ -5435,6 +5532,7 @@
       <p:bldP spid="7" grpId="0" animBg="1"/>
       <p:bldP spid="8" grpId="0" animBg="1"/>
       <p:bldP spid="9" grpId="0" animBg="1"/>
+      <p:bldP spid="10" grpId="0" animBg="1"/>
     </p:bldLst>
   </p:timing>
 </p:sld>

--- a/carousel-output/C05-5-tanda-reset/C05.pptx
+++ b/carousel-output/C05-5-tanda-reset/C05.pptx
@@ -5556,8 +5556,8 @@
         </p:nvSpPr>
         <p:spPr>
           <a:xfrm>
-            <a:off x="762000" y="2478024"/>
-            <a:ext cx="8763000" cy="854202"/>
+            <a:off x="762000" y="2713482"/>
+            <a:ext cx="8763000" cy="764286"/>
           </a:xfrm>
           <a:prstGeom prst="rect">
             <a:avLst/>
@@ -5572,11 +5572,11 @@
           <a:p>
             <a:pPr algn="l">
               <a:lnSpc>
-                <a:spcPts val="6725"/>
+                <a:spcPts val="6017"/>
               </a:lnSpc>
             </a:pPr>
             <a:r>
-              <a:rPr b="0" i="0" sz="5700">
+              <a:rPr b="0" i="0" sz="5100">
                 <a:solidFill>
                   <a:srgbClr val="FFFFFF"/>
                 </a:solidFill>
@@ -5595,12 +5595,12 @@
         </p:nvSpPr>
         <p:spPr>
           <a:xfrm>
-            <a:off x="762000" y="3560826"/>
-            <a:ext cx="8763000" cy="1143000"/>
+            <a:off x="762000" y="3706368"/>
+            <a:ext cx="8763000" cy="1066800"/>
           </a:xfrm>
           <a:prstGeom prst="roundRect">
             <a:avLst>
-              <a:gd name="adj" fmla="val 36666"/>
+              <a:gd name="adj" fmla="val 39285"/>
             </a:avLst>
           </a:prstGeom>
           <a:solidFill>
@@ -5633,7 +5633,7 @@
         </p:nvSpPr>
         <p:spPr>
           <a:xfrm>
-            <a:off x="1085850" y="3770376"/>
+            <a:off x="1085850" y="3877818"/>
             <a:ext cx="723900" cy="723900"/>
           </a:xfrm>
           <a:prstGeom prst="ellipse">
@@ -5663,7 +5663,7 @@
         </p:nvSpPr>
         <p:spPr>
           <a:xfrm>
-            <a:off x="1327150" y="4049379"/>
+            <a:off x="1327150" y="4156821"/>
             <a:ext cx="241300" cy="165894"/>
           </a:xfrm>
           <a:custGeom>
@@ -5930,8 +5930,8 @@
         </p:nvSpPr>
         <p:spPr>
           <a:xfrm>
-            <a:off x="2076450" y="3560826"/>
-            <a:ext cx="7124700" cy="1143000"/>
+            <a:off x="2076450" y="3706368"/>
+            <a:ext cx="7124700" cy="1066800"/>
           </a:xfrm>
           <a:prstGeom prst="rect">
             <a:avLst/>
@@ -5969,12 +5969,12 @@
         </p:nvSpPr>
         <p:spPr>
           <a:xfrm>
-            <a:off x="762000" y="4932426"/>
-            <a:ext cx="8763000" cy="1143000"/>
+            <a:off x="762000" y="5001768"/>
+            <a:ext cx="8763000" cy="1066800"/>
           </a:xfrm>
           <a:prstGeom prst="roundRect">
             <a:avLst>
-              <a:gd name="adj" fmla="val 36666"/>
+              <a:gd name="adj" fmla="val 39285"/>
             </a:avLst>
           </a:prstGeom>
           <a:solidFill>
@@ -6007,7 +6007,7 @@
         </p:nvSpPr>
         <p:spPr>
           <a:xfrm>
-            <a:off x="1085850" y="5141976"/>
+            <a:off x="1085850" y="5173218"/>
             <a:ext cx="723900" cy="723900"/>
           </a:xfrm>
           <a:prstGeom prst="ellipse">
@@ -6037,7 +6037,7 @@
         </p:nvSpPr>
         <p:spPr>
           <a:xfrm>
-            <a:off x="1327150" y="5420979"/>
+            <a:off x="1327150" y="5452221"/>
             <a:ext cx="241300" cy="165894"/>
           </a:xfrm>
           <a:custGeom>
@@ -6304,8 +6304,8 @@
         </p:nvSpPr>
         <p:spPr>
           <a:xfrm>
-            <a:off x="2076450" y="4932426"/>
-            <a:ext cx="7124700" cy="1143000"/>
+            <a:off x="2076450" y="5001768"/>
+            <a:ext cx="7124700" cy="1066800"/>
           </a:xfrm>
           <a:prstGeom prst="rect">
             <a:avLst/>
@@ -6343,12 +6343,12 @@
         </p:nvSpPr>
         <p:spPr>
           <a:xfrm>
-            <a:off x="762000" y="6304026"/>
-            <a:ext cx="8763000" cy="1143000"/>
+            <a:off x="762000" y="6297168"/>
+            <a:ext cx="8763000" cy="1066800"/>
           </a:xfrm>
           <a:prstGeom prst="roundRect">
             <a:avLst>
-              <a:gd name="adj" fmla="val 36666"/>
+              <a:gd name="adj" fmla="val 39285"/>
             </a:avLst>
           </a:prstGeom>
           <a:solidFill>
@@ -6381,7 +6381,7 @@
         </p:nvSpPr>
         <p:spPr>
           <a:xfrm>
-            <a:off x="1085850" y="6513576"/>
+            <a:off x="1085850" y="6468618"/>
             <a:ext cx="723900" cy="723900"/>
           </a:xfrm>
           <a:prstGeom prst="ellipse">
@@ -6411,7 +6411,7 @@
         </p:nvSpPr>
         <p:spPr>
           <a:xfrm>
-            <a:off x="1327150" y="6792579"/>
+            <a:off x="1327150" y="6747621"/>
             <a:ext cx="241300" cy="165894"/>
           </a:xfrm>
           <a:custGeom>
@@ -6678,8 +6678,8 @@
         </p:nvSpPr>
         <p:spPr>
           <a:xfrm>
-            <a:off x="2076450" y="6304026"/>
-            <a:ext cx="7124700" cy="1143000"/>
+            <a:off x="2076450" y="6297168"/>
+            <a:ext cx="7124700" cy="1066800"/>
           </a:xfrm>
           <a:prstGeom prst="rect">
             <a:avLst/>
@@ -6717,12 +6717,12 @@
         </p:nvSpPr>
         <p:spPr>
           <a:xfrm>
-            <a:off x="762000" y="7675626"/>
-            <a:ext cx="8763000" cy="1143000"/>
+            <a:off x="762000" y="7592568"/>
+            <a:ext cx="8763000" cy="1066800"/>
           </a:xfrm>
           <a:prstGeom prst="roundRect">
             <a:avLst>
-              <a:gd name="adj" fmla="val 36666"/>
+              <a:gd name="adj" fmla="val 39285"/>
             </a:avLst>
           </a:prstGeom>
           <a:solidFill>
@@ -6755,7 +6755,7 @@
         </p:nvSpPr>
         <p:spPr>
           <a:xfrm>
-            <a:off x="1085850" y="7885176"/>
+            <a:off x="1085850" y="7764018"/>
             <a:ext cx="723900" cy="723900"/>
           </a:xfrm>
           <a:prstGeom prst="ellipse">
@@ -6785,7 +6785,7 @@
         </p:nvSpPr>
         <p:spPr>
           <a:xfrm>
-            <a:off x="1327150" y="8164179"/>
+            <a:off x="1327150" y="8043021"/>
             <a:ext cx="241300" cy="165894"/>
           </a:xfrm>
           <a:custGeom>
@@ -7052,8 +7052,8 @@
         </p:nvSpPr>
         <p:spPr>
           <a:xfrm>
-            <a:off x="2076450" y="7675626"/>
-            <a:ext cx="7124700" cy="1143000"/>
+            <a:off x="2076450" y="7592568"/>
+            <a:ext cx="7124700" cy="1066800"/>
           </a:xfrm>
           <a:prstGeom prst="rect">
             <a:avLst/>
@@ -7091,12 +7091,12 @@
         </p:nvSpPr>
         <p:spPr>
           <a:xfrm>
-            <a:off x="762000" y="9047226"/>
-            <a:ext cx="8763000" cy="1143000"/>
+            <a:off x="762000" y="8887968"/>
+            <a:ext cx="8763000" cy="1066800"/>
           </a:xfrm>
           <a:prstGeom prst="roundRect">
             <a:avLst>
-              <a:gd name="adj" fmla="val 36666"/>
+              <a:gd name="adj" fmla="val 39285"/>
             </a:avLst>
           </a:prstGeom>
           <a:solidFill>
@@ -7129,7 +7129,7 @@
         </p:nvSpPr>
         <p:spPr>
           <a:xfrm>
-            <a:off x="1085850" y="9256776"/>
+            <a:off x="1085850" y="9059418"/>
             <a:ext cx="723900" cy="723900"/>
           </a:xfrm>
           <a:prstGeom prst="ellipse">
@@ -7159,7 +7159,7 @@
         </p:nvSpPr>
         <p:spPr>
           <a:xfrm>
-            <a:off x="1327150" y="9535779"/>
+            <a:off x="1327150" y="9338421"/>
             <a:ext cx="241300" cy="165894"/>
           </a:xfrm>
           <a:custGeom>
@@ -7426,8 +7426,8 @@
         </p:nvSpPr>
         <p:spPr>
           <a:xfrm>
-            <a:off x="2076450" y="9047226"/>
-            <a:ext cx="7124700" cy="1143000"/>
+            <a:off x="2076450" y="8887968"/>
+            <a:ext cx="7124700" cy="1066800"/>
           </a:xfrm>
           <a:prstGeom prst="rect">
             <a:avLst/>
